--- a/public/fun/cards/teacher/teacher-44.pptx
+++ b/public/fun/cards/teacher/teacher-44.pptx
@@ -3085,7 +3085,7 @@
     <p:bg>
       <p:bgPr>
         <a:solidFill>
-          <a:srgbClr val="FFFFFF"/>
+          <a:srgbClr val="FCE8F5"/>
         </a:solidFill>
         <a:effectLst/>
       </p:bgPr>
@@ -3099,38 +3099,20 @@
       <p:grpSpPr/>
       <p:sp>
         <p:nvSpPr>
-          <p:cNvPr id="2" name="Freeform 1"/>
+          <p:cNvPr id="2" name="Rectangle 1"/>
           <p:cNvSpPr/>
           <p:nvPr/>
         </p:nvSpPr>
         <p:spPr>
           <a:xfrm>
-            <a:off x="1944000" y="540000"/>
-            <a:ext cx="1296000" cy="1260000"/>
+            <a:off x="252000" y="144000"/>
+            <a:ext cx="201600" cy="21600"/>
           </a:xfrm>
-          <a:custGeom>
+          <a:prstGeom prst="rect">
             <a:avLst/>
-            <a:gdLst/>
-            <a:ahLst/>
-            <a:cxnLst/>
-            <a:rect l="l" t="t" r="r" b="b"/>
-            <a:pathLst>
-              <a:path w="1296000" h="1260000">
-                <a:moveTo>
-                  <a:pt x="1296000" y="1260000"/>
-                </a:moveTo>
-                <a:lnTo>
-                  <a:pt x="1296000" y="0"/>
-                </a:lnTo>
-                <a:lnTo>
-                  <a:pt x="0" y="1260000"/>
-                </a:lnTo>
-                <a:close/>
-              </a:path>
-            </a:pathLst>
-          </a:custGeom>
+          </a:prstGeom>
           <a:solidFill>
-            <a:srgbClr val="4B868B"/>
+            <a:srgbClr val="E5169B"/>
           </a:solidFill>
           <a:ln>
             <a:noFill/>
@@ -3146,163 +3128,14 @@
       </p:sp>
       <p:sp>
         <p:nvSpPr>
-          <p:cNvPr id="3" name="Freeform 2"/>
-          <p:cNvSpPr/>
+          <p:cNvPr id="3" name="텍스트"/>
+          <p:cNvSpPr txBox="1"/>
           <p:nvPr/>
         </p:nvSpPr>
         <p:spPr>
           <a:xfrm>
-            <a:off x="2520000" y="1080000"/>
-            <a:ext cx="720000" cy="720000"/>
-          </a:xfrm>
-          <a:custGeom>
-            <a:avLst/>
-            <a:gdLst/>
-            <a:ahLst/>
-            <a:cxnLst/>
-            <a:rect l="l" t="t" r="r" b="b"/>
-            <a:pathLst>
-              <a:path w="720000" h="720000">
-                <a:moveTo>
-                  <a:pt x="720000" y="720000"/>
-                </a:moveTo>
-                <a:lnTo>
-                  <a:pt x="720000" y="0"/>
-                </a:lnTo>
-                <a:lnTo>
-                  <a:pt x="0" y="720000"/>
-                </a:lnTo>
-                <a:close/>
-              </a:path>
-            </a:pathLst>
-          </a:custGeom>
-          <a:solidFill>
-            <a:srgbClr val="D6E9EB">
-              <a:alpha val="90000"/>
-            </a:srgbClr>
-          </a:solidFill>
-          <a:ln>
-            <a:noFill/>
-          </a:ln>
-        </p:spPr>
-        <p:txBody>
-          <a:bodyPr rtlCol="0" anchor="ctr"/>
-          <a:lstStyle/>
-          <a:p>
-            <a:pPr algn="ctr"/>
-          </a:p>
-        </p:txBody>
-      </p:sp>
-      <p:sp>
-        <p:nvSpPr>
-          <p:cNvPr id="4" name="Freeform 3"/>
-          <p:cNvSpPr/>
-          <p:nvPr/>
-        </p:nvSpPr>
-        <p:spPr>
-          <a:xfrm>
-            <a:off x="2829456" y="1401408"/>
-            <a:ext cx="117216" cy="170496"/>
-          </a:xfrm>
-          <a:custGeom>
-            <a:avLst/>
-            <a:gdLst/>
-            <a:ahLst/>
-            <a:cxnLst/>
-            <a:rect l="l" t="t" r="r" b="b"/>
-            <a:pathLst>
-              <a:path w="117216" h="170496">
-                <a:moveTo>
-                  <a:pt x="0" y="0"/>
-                </a:moveTo>
-                <a:lnTo>
-                  <a:pt x="117216" y="21312"/>
-                </a:lnTo>
-                <a:lnTo>
-                  <a:pt x="117216" y="170496"/>
-                </a:lnTo>
-                <a:lnTo>
-                  <a:pt x="0" y="149184"/>
-                </a:lnTo>
-                <a:close/>
-              </a:path>
-            </a:pathLst>
-          </a:custGeom>
-          <a:solidFill>
-            <a:srgbClr val="FFFFFF"/>
-          </a:solidFill>
-          <a:ln>
-            <a:noFill/>
-          </a:ln>
-        </p:spPr>
-        <p:txBody>
-          <a:bodyPr rtlCol="0" anchor="ctr"/>
-          <a:lstStyle/>
-          <a:p>
-            <a:pPr algn="ctr"/>
-          </a:p>
-        </p:txBody>
-      </p:sp>
-      <p:sp>
-        <p:nvSpPr>
-          <p:cNvPr id="5" name="Freeform 4"/>
-          <p:cNvSpPr/>
-          <p:nvPr/>
-        </p:nvSpPr>
-        <p:spPr>
-          <a:xfrm>
-            <a:off x="2957328" y="1401408"/>
-            <a:ext cx="117216" cy="170496"/>
-          </a:xfrm>
-          <a:custGeom>
-            <a:avLst/>
-            <a:gdLst/>
-            <a:ahLst/>
-            <a:cxnLst/>
-            <a:rect l="l" t="t" r="r" b="b"/>
-            <a:pathLst>
-              <a:path w="117216" h="170496">
-                <a:moveTo>
-                  <a:pt x="117216" y="0"/>
-                </a:moveTo>
-                <a:lnTo>
-                  <a:pt x="0" y="21312"/>
-                </a:lnTo>
-                <a:lnTo>
-                  <a:pt x="0" y="170496"/>
-                </a:lnTo>
-                <a:lnTo>
-                  <a:pt x="117216" y="149184"/>
-                </a:lnTo>
-                <a:close/>
-              </a:path>
-            </a:pathLst>
-          </a:custGeom>
-          <a:solidFill>
-            <a:srgbClr val="808080"/>
-          </a:solidFill>
-          <a:ln>
-            <a:noFill/>
-          </a:ln>
-        </p:spPr>
-        <p:txBody>
-          <a:bodyPr rtlCol="0" anchor="ctr"/>
-          <a:lstStyle/>
-          <a:p>
-            <a:pPr algn="ctr"/>
-          </a:p>
-        </p:txBody>
-      </p:sp>
-      <p:sp>
-        <p:nvSpPr>
-          <p:cNvPr id="6" name="텍스트"/>
-          <p:cNvSpPr txBox="1"/>
-          <p:nvPr/>
-        </p:nvSpPr>
-        <p:spPr>
-          <a:xfrm>
-            <a:off x="252000" y="201600"/>
-            <a:ext cx="1800000" cy="100800"/>
+            <a:off x="252000" y="273600"/>
+            <a:ext cx="2160000" cy="360000"/>
           </a:xfrm>
           <a:prstGeom prst="rect">
             <a:avLst/>
@@ -3317,32 +3150,32 @@
           <a:p>
             <a:pPr algn="l">
               <a:lnSpc>
-                <a:spcPts val="1087"/>
+                <a:spcPts val="3190"/>
               </a:lnSpc>
             </a:pPr>
             <a:r>
-              <a:rPr sz="750" b="1" spc="150">
+              <a:rPr sz="2200" b="1">
                 <a:solidFill>
-                  <a:srgbClr val="687A7B"/>
+                  <a:srgbClr val="12151C"/>
                 </a:solidFill>
                 <a:latin typeface="맑은 고딕"/>
                 <a:ea typeface="맑은 고딕"/>
               </a:rPr>
-              <a:t>학교 · 학원 이름</a:t>
-            </a:r>
-          </a:p>
-        </p:txBody>
-      </p:sp>
-      <p:sp>
-        <p:nvSpPr>
-          <p:cNvPr id="7" name="텍스트"/>
+              <a:t>연주혁</a:t>
+            </a:r>
+          </a:p>
+        </p:txBody>
+      </p:sp>
+      <p:sp>
+        <p:nvSpPr>
+          <p:cNvPr id="4" name="텍스트"/>
           <p:cNvSpPr txBox="1"/>
           <p:nvPr/>
         </p:nvSpPr>
         <p:spPr>
           <a:xfrm>
-            <a:off x="252000" y="360000"/>
-            <a:ext cx="2016000" cy="313692"/>
+            <a:off x="252000" y="676800"/>
+            <a:ext cx="2160000" cy="171451"/>
           </a:xfrm>
           <a:prstGeom prst="rect">
             <a:avLst/>
@@ -3357,32 +3190,32 @@
           <a:p>
             <a:pPr algn="l">
               <a:lnSpc>
-                <a:spcPts val="2755"/>
+                <a:spcPts val="1305"/>
               </a:lnSpc>
             </a:pPr>
             <a:r>
-              <a:rPr sz="1900" b="1" spc="50">
+              <a:rPr sz="900" b="0">
                 <a:solidFill>
-                  <a:srgbClr val="274649"/>
+                  <a:srgbClr val="62154C"/>
                 </a:solidFill>
                 <a:latin typeface="맑은 고딕"/>
                 <a:ea typeface="맑은 고딕"/>
               </a:rPr>
-              <a:t>연주혁</a:t>
-            </a:r>
-          </a:p>
-        </p:txBody>
-      </p:sp>
-      <p:sp>
-        <p:nvSpPr>
-          <p:cNvPr id="8" name="텍스트"/>
+              <a:t>유치원 교사</a:t>
+            </a:r>
+          </a:p>
+        </p:txBody>
+      </p:sp>
+      <p:sp>
+        <p:nvSpPr>
+          <p:cNvPr id="5" name="텍스트"/>
           <p:cNvSpPr txBox="1"/>
           <p:nvPr/>
         </p:nvSpPr>
         <p:spPr>
           <a:xfrm>
-            <a:off x="252000" y="655200"/>
-            <a:ext cx="1872000" cy="122400"/>
+            <a:off x="1548000" y="230400"/>
+            <a:ext cx="1440000" cy="123826"/>
           </a:xfrm>
           <a:prstGeom prst="rect">
             <a:avLst/>
@@ -3395,63 +3228,55 @@
           </a:bodyPr>
           <a:lstStyle/>
           <a:p>
-            <a:pPr algn="l">
+            <a:pPr algn="r">
               <a:lnSpc>
-                <a:spcPts val="1232"/>
+                <a:spcPts val="942"/>
               </a:lnSpc>
             </a:pPr>
             <a:r>
-              <a:rPr sz="850" b="1">
+              <a:rPr sz="650" b="1" spc="200">
                 <a:solidFill>
-                  <a:srgbClr val="477F84"/>
+                  <a:srgbClr val="62154C"/>
                 </a:solidFill>
                 <a:latin typeface="맑은 고딕"/>
                 <a:ea typeface="맑은 고딕"/>
               </a:rPr>
-              <a:t>유치원 교사</a:t>
-            </a:r>
-          </a:p>
-        </p:txBody>
-      </p:sp>
-      <p:sp>
-        <p:nvSpPr>
-          <p:cNvPr id="9" name="Rectangle 8"/>
-          <p:cNvSpPr/>
+              <a:t>학교 · 학원 이름</a:t>
+            </a:r>
+          </a:p>
+        </p:txBody>
+      </p:sp>
+      <p:cxnSp>
+        <p:nvCxnSpPr>
+          <p:cNvPr id="6" name="Connector 5"/>
+          <p:cNvCxnSpPr/>
           <p:nvPr/>
-        </p:nvSpPr>
+        </p:nvCxnSpPr>
         <p:spPr>
           <a:xfrm>
-            <a:off x="252000" y="864000"/>
-            <a:ext cx="230400" cy="14400"/>
+            <a:off x="252000" y="1051200"/>
+            <a:ext cx="2736000" cy="0"/>
           </a:xfrm>
-          <a:prstGeom prst="rect">
+          <a:prstGeom prst="line">
             <a:avLst/>
           </a:prstGeom>
-          <a:solidFill>
-            <a:srgbClr val="4B868B"/>
-          </a:solidFill>
-          <a:ln>
-            <a:noFill/>
+          <a:ln w="5760">
+            <a:solidFill>
+              <a:srgbClr val="F8BEE3"/>
+            </a:solidFill>
           </a:ln>
         </p:spPr>
-        <p:txBody>
-          <a:bodyPr rtlCol="0" anchor="ctr"/>
-          <a:lstStyle/>
-          <a:p>
-            <a:pPr algn="ctr"/>
-          </a:p>
-        </p:txBody>
-      </p:sp>
-      <p:sp>
-        <p:nvSpPr>
-          <p:cNvPr id="10" name="텍스트"/>
+      </p:cxnSp>
+      <p:sp>
+        <p:nvSpPr>
+          <p:cNvPr id="7" name="텍스트"/>
           <p:cNvSpPr txBox="1"/>
           <p:nvPr/>
         </p:nvSpPr>
         <p:spPr>
           <a:xfrm>
-            <a:off x="252000" y="1044000"/>
-            <a:ext cx="122400" cy="168911"/>
+            <a:off x="252000" y="1123200"/>
+            <a:ext cx="576000" cy="99061"/>
           </a:xfrm>
           <a:prstGeom prst="rect">
             <a:avLst/>
@@ -3466,32 +3291,32 @@
           <a:p>
             <a:pPr algn="l">
               <a:lnSpc>
-                <a:spcPts val="1015"/>
+                <a:spcPts val="754"/>
               </a:lnSpc>
             </a:pPr>
             <a:r>
-              <a:rPr sz="700" b="1">
+              <a:rPr sz="520" b="1" spc="150">
                 <a:solidFill>
-                  <a:srgbClr val="477F84"/>
+                  <a:srgbClr val="62154C"/>
                 </a:solidFill>
                 <a:latin typeface="맑은 고딕"/>
                 <a:ea typeface="맑은 고딕"/>
               </a:rPr>
-              <a:t>T</a:t>
-            </a:r>
-          </a:p>
-        </p:txBody>
-      </p:sp>
-      <p:sp>
-        <p:nvSpPr>
-          <p:cNvPr id="11" name="텍스트"/>
+              <a:t>TEL</a:t>
+            </a:r>
+          </a:p>
+        </p:txBody>
+      </p:sp>
+      <p:sp>
+        <p:nvSpPr>
+          <p:cNvPr id="8" name="텍스트"/>
           <p:cNvSpPr txBox="1"/>
           <p:nvPr/>
         </p:nvSpPr>
         <p:spPr>
           <a:xfrm>
-            <a:off x="396000" y="1044000"/>
-            <a:ext cx="1584000" cy="168911"/>
+            <a:off x="900000" y="1101600"/>
+            <a:ext cx="2088000" cy="142876"/>
           </a:xfrm>
           <a:prstGeom prst="rect">
             <a:avLst/>
@@ -3506,13 +3331,13 @@
           <a:p>
             <a:pPr algn="l">
               <a:lnSpc>
-                <a:spcPts val="1015"/>
+                <a:spcPts val="1087"/>
               </a:lnSpc>
             </a:pPr>
             <a:r>
-              <a:rPr sz="700" b="0">
+              <a:rPr sz="750" b="0">
                 <a:solidFill>
-                  <a:srgbClr val="274649"/>
+                  <a:srgbClr val="12151C"/>
                 </a:solidFill>
                 <a:latin typeface="맑은 고딕"/>
                 <a:ea typeface="맑은 고딕"/>
@@ -3522,16 +3347,37 @@
           </a:p>
         </p:txBody>
       </p:sp>
-      <p:sp>
-        <p:nvSpPr>
-          <p:cNvPr id="12" name="텍스트"/>
+      <p:cxnSp>
+        <p:nvCxnSpPr>
+          <p:cNvPr id="9" name="Connector 8"/>
+          <p:cNvCxnSpPr/>
+          <p:nvPr/>
+        </p:nvCxnSpPr>
+        <p:spPr>
+          <a:xfrm>
+            <a:off x="252000" y="1274400"/>
+            <a:ext cx="2736000" cy="0"/>
+          </a:xfrm>
+          <a:prstGeom prst="line">
+            <a:avLst/>
+          </a:prstGeom>
+          <a:ln w="5760">
+            <a:solidFill>
+              <a:srgbClr val="F8BEE3"/>
+            </a:solidFill>
+          </a:ln>
+        </p:spPr>
+      </p:cxnSp>
+      <p:sp>
+        <p:nvSpPr>
+          <p:cNvPr id="10" name="텍스트"/>
           <p:cNvSpPr txBox="1"/>
           <p:nvPr/>
         </p:nvSpPr>
         <p:spPr>
           <a:xfrm>
-            <a:off x="252000" y="1212911"/>
-            <a:ext cx="122400" cy="168911"/>
+            <a:off x="252000" y="1346400"/>
+            <a:ext cx="576000" cy="99061"/>
           </a:xfrm>
           <a:prstGeom prst="rect">
             <a:avLst/>
@@ -3546,32 +3392,32 @@
           <a:p>
             <a:pPr algn="l">
               <a:lnSpc>
-                <a:spcPts val="1015"/>
+                <a:spcPts val="754"/>
               </a:lnSpc>
             </a:pPr>
             <a:r>
-              <a:rPr sz="700" b="1">
+              <a:rPr sz="520" b="1" spc="150">
                 <a:solidFill>
-                  <a:srgbClr val="477F84"/>
+                  <a:srgbClr val="62154C"/>
                 </a:solidFill>
                 <a:latin typeface="맑은 고딕"/>
                 <a:ea typeface="맑은 고딕"/>
               </a:rPr>
-              <a:t>E</a:t>
-            </a:r>
-          </a:p>
-        </p:txBody>
-      </p:sp>
-      <p:sp>
-        <p:nvSpPr>
-          <p:cNvPr id="13" name="텍스트"/>
+              <a:t>MAIL</a:t>
+            </a:r>
+          </a:p>
+        </p:txBody>
+      </p:sp>
+      <p:sp>
+        <p:nvSpPr>
+          <p:cNvPr id="11" name="텍스트"/>
           <p:cNvSpPr txBox="1"/>
           <p:nvPr/>
         </p:nvSpPr>
         <p:spPr>
           <a:xfrm>
-            <a:off x="396000" y="1212911"/>
-            <a:ext cx="1584000" cy="168911"/>
+            <a:off x="900000" y="1324800"/>
+            <a:ext cx="2088000" cy="142876"/>
           </a:xfrm>
           <a:prstGeom prst="rect">
             <a:avLst/>
@@ -3586,13 +3432,13 @@
           <a:p>
             <a:pPr algn="l">
               <a:lnSpc>
-                <a:spcPts val="1015"/>
+                <a:spcPts val="1087"/>
               </a:lnSpc>
             </a:pPr>
             <a:r>
-              <a:rPr sz="700" b="0">
+              <a:rPr sz="750" b="0">
                 <a:solidFill>
-                  <a:srgbClr val="274649"/>
+                  <a:srgbClr val="12151C"/>
                 </a:solidFill>
                 <a:latin typeface="맑은 고딕"/>
                 <a:ea typeface="맑은 고딕"/>
@@ -3602,16 +3448,37 @@
           </a:p>
         </p:txBody>
       </p:sp>
-      <p:sp>
-        <p:nvSpPr>
-          <p:cNvPr id="14" name="텍스트"/>
+      <p:cxnSp>
+        <p:nvCxnSpPr>
+          <p:cNvPr id="12" name="Connector 11"/>
+          <p:cNvCxnSpPr/>
+          <p:nvPr/>
+        </p:nvCxnSpPr>
+        <p:spPr>
+          <a:xfrm>
+            <a:off x="252000" y="1497600"/>
+            <a:ext cx="2736000" cy="0"/>
+          </a:xfrm>
+          <a:prstGeom prst="line">
+            <a:avLst/>
+          </a:prstGeom>
+          <a:ln w="5760">
+            <a:solidFill>
+              <a:srgbClr val="F8BEE3"/>
+            </a:solidFill>
+          </a:ln>
+        </p:spPr>
+      </p:cxnSp>
+      <p:sp>
+        <p:nvSpPr>
+          <p:cNvPr id="13" name="텍스트"/>
           <p:cNvSpPr txBox="1"/>
           <p:nvPr/>
         </p:nvSpPr>
         <p:spPr>
           <a:xfrm>
-            <a:off x="252000" y="1381822"/>
-            <a:ext cx="122400" cy="168911"/>
+            <a:off x="252000" y="1569600"/>
+            <a:ext cx="576000" cy="99061"/>
           </a:xfrm>
           <a:prstGeom prst="rect">
             <a:avLst/>
@@ -3626,32 +3493,32 @@
           <a:p>
             <a:pPr algn="l">
               <a:lnSpc>
-                <a:spcPts val="1015"/>
+                <a:spcPts val="754"/>
               </a:lnSpc>
             </a:pPr>
             <a:r>
-              <a:rPr sz="700" b="1">
+              <a:rPr sz="520" b="1" spc="150">
                 <a:solidFill>
-                  <a:srgbClr val="477F84"/>
+                  <a:srgbClr val="62154C"/>
                 </a:solidFill>
                 <a:latin typeface="맑은 고딕"/>
                 <a:ea typeface="맑은 고딕"/>
               </a:rPr>
-              <a:t>A</a:t>
-            </a:r>
-          </a:p>
-        </p:txBody>
-      </p:sp>
-      <p:sp>
-        <p:nvSpPr>
-          <p:cNvPr id="15" name="텍스트"/>
+              <a:t>ADDR</a:t>
+            </a:r>
+          </a:p>
+        </p:txBody>
+      </p:sp>
+      <p:sp>
+        <p:nvSpPr>
+          <p:cNvPr id="14" name="텍스트"/>
           <p:cNvSpPr txBox="1"/>
           <p:nvPr/>
         </p:nvSpPr>
         <p:spPr>
           <a:xfrm>
-            <a:off x="396000" y="1381822"/>
-            <a:ext cx="1584000" cy="168911"/>
+            <a:off x="900000" y="1548000"/>
+            <a:ext cx="2088000" cy="142876"/>
           </a:xfrm>
           <a:prstGeom prst="rect">
             <a:avLst/>
@@ -3666,13 +3533,13 @@
           <a:p>
             <a:pPr algn="l">
               <a:lnSpc>
-                <a:spcPts val="1015"/>
+                <a:spcPts val="1087"/>
               </a:lnSpc>
             </a:pPr>
             <a:r>
-              <a:rPr sz="700" b="0">
+              <a:rPr sz="750" b="0">
                 <a:solidFill>
-                  <a:srgbClr val="274649"/>
+                  <a:srgbClr val="12151C"/>
                 </a:solidFill>
                 <a:latin typeface="맑은 고딕"/>
                 <a:ea typeface="맑은 고딕"/>
@@ -3682,6 +3549,27 @@
           </a:p>
         </p:txBody>
       </p:sp>
+      <p:cxnSp>
+        <p:nvCxnSpPr>
+          <p:cNvPr id="15" name="Connector 14"/>
+          <p:cNvCxnSpPr/>
+          <p:nvPr/>
+        </p:nvCxnSpPr>
+        <p:spPr>
+          <a:xfrm>
+            <a:off x="252000" y="1720800"/>
+            <a:ext cx="2736000" cy="0"/>
+          </a:xfrm>
+          <a:prstGeom prst="line">
+            <a:avLst/>
+          </a:prstGeom>
+          <a:ln w="5760">
+            <a:solidFill>
+              <a:srgbClr val="F8BEE3"/>
+            </a:solidFill>
+          </a:ln>
+        </p:spPr>
+      </p:cxnSp>
     </p:spTree>
   </p:cSld>
   <p:clrMapOvr>
@@ -3696,7 +3584,7 @@
     <p:bg>
       <p:bgPr>
         <a:solidFill>
-          <a:srgbClr val="274649"/>
+          <a:srgbClr val="0E1116"/>
         </a:solidFill>
         <a:effectLst/>
       </p:bgPr>
@@ -3710,23 +3598,23 @@
       <p:grpSpPr/>
       <p:sp>
         <p:nvSpPr>
-          <p:cNvPr id="2" name="Rectangle 1"/>
+          <p:cNvPr id="2" name="Oval 1"/>
           <p:cNvSpPr/>
           <p:nvPr/>
         </p:nvSpPr>
         <p:spPr>
           <a:xfrm>
-            <a:off x="108000" y="108000"/>
-            <a:ext cx="3024000" cy="1584000"/>
+            <a:off x="1591200" y="511200"/>
+            <a:ext cx="57600" cy="57600"/>
           </a:xfrm>
-          <a:prstGeom prst="rect">
+          <a:prstGeom prst="ellipse">
             <a:avLst/>
           </a:prstGeom>
-          <a:noFill/>
-          <a:ln w="10800">
-            <a:solidFill>
-              <a:srgbClr val="7DA8AB"/>
-            </a:solidFill>
+          <a:solidFill>
+            <a:srgbClr val="E5169B"/>
+          </a:solidFill>
+          <a:ln>
+            <a:noFill/>
           </a:ln>
         </p:spPr>
         <p:txBody>
@@ -3745,8 +3633,8 @@
         </p:nvSpPr>
         <p:spPr>
           <a:xfrm>
-            <a:off x="396000" y="504000"/>
-            <a:ext cx="2448000" cy="432000"/>
+            <a:off x="396000" y="684000"/>
+            <a:ext cx="2448000" cy="504000"/>
           </a:xfrm>
           <a:prstGeom prst="rect">
             <a:avLst/>
@@ -3754,7 +3642,7 @@
           <a:noFill/>
         </p:spPr>
         <p:txBody>
-          <a:bodyPr wrap="square" lIns="0" rIns="0" tIns="0" bIns="0" anchor="ctr">
+          <a:bodyPr wrap="square" lIns="0" rIns="0" tIns="0" bIns="0" anchor="t">
             <a:spAutoFit/>
           </a:bodyPr>
           <a:lstStyle/>
@@ -3777,66 +3665,16 @@
           </a:p>
         </p:txBody>
       </p:sp>
-      <p:cxnSp>
-        <p:nvCxnSpPr>
-          <p:cNvPr id="4" name="Connector 3"/>
-          <p:cNvCxnSpPr/>
+      <p:sp>
+        <p:nvSpPr>
+          <p:cNvPr id="4" name="텍스트"/>
+          <p:cNvSpPr txBox="1"/>
           <p:nvPr/>
-        </p:nvCxnSpPr>
+        </p:nvSpPr>
         <p:spPr>
           <a:xfrm>
-            <a:off x="1260000" y="1080000"/>
-            <a:ext cx="684000" cy="0"/>
-          </a:xfrm>
-          <a:prstGeom prst="line">
-            <a:avLst/>
-          </a:prstGeom>
-          <a:ln w="7200">
-            <a:solidFill>
-              <a:srgbClr val="7DA8AB"/>
-            </a:solidFill>
-          </a:ln>
-        </p:spPr>
-      </p:cxnSp>
-      <p:sp>
-        <p:nvSpPr>
-          <p:cNvPr id="5" name="Oval 4"/>
-          <p:cNvSpPr/>
-          <p:nvPr/>
-        </p:nvSpPr>
-        <p:spPr>
-          <a:xfrm>
-            <a:off x="1594800" y="1054800"/>
-            <a:ext cx="50400" cy="50400"/>
-          </a:xfrm>
-          <a:prstGeom prst="ellipse">
-            <a:avLst/>
-          </a:prstGeom>
-          <a:solidFill>
-            <a:srgbClr val="7DA8AB"/>
-          </a:solidFill>
-          <a:ln>
-            <a:noFill/>
-          </a:ln>
-        </p:spPr>
-        <p:txBody>
-          <a:bodyPr rtlCol="0" anchor="ctr"/>
-          <a:lstStyle/>
-          <a:p>
-            <a:pPr algn="ctr"/>
-          </a:p>
-        </p:txBody>
-      </p:sp>
-      <p:sp>
-        <p:nvSpPr>
-          <p:cNvPr id="6" name="텍스트"/>
-          <p:cNvSpPr txBox="1"/>
-          <p:nvPr/>
-        </p:nvSpPr>
-        <p:spPr>
-          <a:xfrm>
-            <a:off x="360000" y="1224000"/>
-            <a:ext cx="2520000" cy="108000"/>
+            <a:off x="360000" y="1339200"/>
+            <a:ext cx="2520000" cy="123826"/>
           </a:xfrm>
           <a:prstGeom prst="rect">
             <a:avLst/>
@@ -3851,119 +3689,19 @@
           <a:p>
             <a:pPr algn="ctr">
               <a:lnSpc>
-                <a:spcPts val="1087"/>
+                <a:spcPts val="942"/>
               </a:lnSpc>
             </a:pPr>
             <a:r>
-              <a:rPr sz="750" b="1" spc="300">
+              <a:rPr sz="650" b="1" spc="300">
                 <a:solidFill>
-                  <a:srgbClr val="B3BEBF"/>
+                  <a:srgbClr val="A3A9B5"/>
                 </a:solidFill>
                 <a:latin typeface="맑은 고딕"/>
                 <a:ea typeface="맑은 고딕"/>
               </a:rPr>
               <a:t>학교 · 학원 이름</a:t>
             </a:r>
-          </a:p>
-        </p:txBody>
-      </p:sp>
-      <p:sp>
-        <p:nvSpPr>
-          <p:cNvPr id="7" name="Freeform 6"/>
-          <p:cNvSpPr/>
-          <p:nvPr/>
-        </p:nvSpPr>
-        <p:spPr>
-          <a:xfrm>
-            <a:off x="1537200" y="273600"/>
-            <a:ext cx="79200" cy="115200"/>
-          </a:xfrm>
-          <a:custGeom>
-            <a:avLst/>
-            <a:gdLst/>
-            <a:ahLst/>
-            <a:cxnLst/>
-            <a:rect l="l" t="t" r="r" b="b"/>
-            <a:pathLst>
-              <a:path w="79200" h="115200">
-                <a:moveTo>
-                  <a:pt x="0" y="0"/>
-                </a:moveTo>
-                <a:lnTo>
-                  <a:pt x="79200" y="14400"/>
-                </a:lnTo>
-                <a:lnTo>
-                  <a:pt x="79200" y="115200"/>
-                </a:lnTo>
-                <a:lnTo>
-                  <a:pt x="0" y="100800"/>
-                </a:lnTo>
-                <a:close/>
-              </a:path>
-            </a:pathLst>
-          </a:custGeom>
-          <a:solidFill>
-            <a:srgbClr val="7DA8AB"/>
-          </a:solidFill>
-          <a:ln>
-            <a:noFill/>
-          </a:ln>
-        </p:spPr>
-        <p:txBody>
-          <a:bodyPr rtlCol="0" anchor="ctr"/>
-          <a:lstStyle/>
-          <a:p>
-            <a:pPr algn="ctr"/>
-          </a:p>
-        </p:txBody>
-      </p:sp>
-      <p:sp>
-        <p:nvSpPr>
-          <p:cNvPr id="8" name="Freeform 7"/>
-          <p:cNvSpPr/>
-          <p:nvPr/>
-        </p:nvSpPr>
-        <p:spPr>
-          <a:xfrm>
-            <a:off x="1623600" y="273600"/>
-            <a:ext cx="79200" cy="115200"/>
-          </a:xfrm>
-          <a:custGeom>
-            <a:avLst/>
-            <a:gdLst/>
-            <a:ahLst/>
-            <a:cxnLst/>
-            <a:rect l="l" t="t" r="r" b="b"/>
-            <a:pathLst>
-              <a:path w="79200" h="115200">
-                <a:moveTo>
-                  <a:pt x="79200" y="0"/>
-                </a:moveTo>
-                <a:lnTo>
-                  <a:pt x="0" y="14400"/>
-                </a:lnTo>
-                <a:lnTo>
-                  <a:pt x="0" y="115200"/>
-                </a:lnTo>
-                <a:lnTo>
-                  <a:pt x="79200" y="100800"/>
-                </a:lnTo>
-                <a:close/>
-              </a:path>
-            </a:pathLst>
-          </a:custGeom>
-          <a:solidFill>
-            <a:srgbClr val="4A6466"/>
-          </a:solidFill>
-          <a:ln>
-            <a:noFill/>
-          </a:ln>
-        </p:spPr>
-        <p:txBody>
-          <a:bodyPr rtlCol="0" anchor="ctr"/>
-          <a:lstStyle/>
-          <a:p>
-            <a:pPr algn="ctr"/>
           </a:p>
         </p:txBody>
       </p:sp>

--- a/public/fun/cards/teacher/teacher-44.pptx
+++ b/public/fun/cards/teacher/teacher-44.pptx
@@ -3105,8 +3105,8 @@
         </p:nvSpPr>
         <p:spPr>
           <a:xfrm>
-            <a:off x="252000" y="144000"/>
-            <a:ext cx="201600" cy="21600"/>
+            <a:off x="0" y="0"/>
+            <a:ext cx="3240000" cy="36000"/>
           </a:xfrm>
           <a:prstGeom prst="rect">
             <a:avLst/>
@@ -3134,8 +3134,8 @@
         </p:nvSpPr>
         <p:spPr>
           <a:xfrm>
-            <a:off x="252000" y="273600"/>
-            <a:ext cx="2160000" cy="360000"/>
+            <a:off x="252000" y="223200"/>
+            <a:ext cx="1296000" cy="237600"/>
           </a:xfrm>
           <a:prstGeom prst="rect">
             <a:avLst/>
@@ -3150,11 +3150,11 @@
           <a:p>
             <a:pPr algn="l">
               <a:lnSpc>
-                <a:spcPts val="3190"/>
+                <a:spcPts val="1957"/>
               </a:lnSpc>
             </a:pPr>
             <a:r>
-              <a:rPr sz="2200" b="1">
+              <a:rPr sz="1350" b="1" spc="120">
                 <a:solidFill>
                   <a:srgbClr val="12151C"/>
                 </a:solidFill>
@@ -3174,8 +3174,8 @@
         </p:nvSpPr>
         <p:spPr>
           <a:xfrm>
-            <a:off x="252000" y="676800"/>
-            <a:ext cx="2160000" cy="171451"/>
+            <a:off x="252000" y="475200"/>
+            <a:ext cx="1296000" cy="133351"/>
           </a:xfrm>
           <a:prstGeom prst="rect">
             <a:avLst/>
@@ -3190,11 +3190,11 @@
           <a:p>
             <a:pPr algn="l">
               <a:lnSpc>
-                <a:spcPts val="1305"/>
+                <a:spcPts val="1015"/>
               </a:lnSpc>
             </a:pPr>
             <a:r>
-              <a:rPr sz="900" b="0">
+              <a:rPr sz="700" b="0">
                 <a:solidFill>
                   <a:srgbClr val="62154C"/>
                 </a:solidFill>
@@ -3214,7 +3214,7 @@
         </p:nvSpPr>
         <p:spPr>
           <a:xfrm>
-            <a:off x="1548000" y="230400"/>
+            <a:off x="1548000" y="259200"/>
             <a:ext cx="1440000" cy="123826"/>
           </a:xfrm>
           <a:prstGeom prst="rect">
@@ -3234,7 +3234,7 @@
               </a:lnSpc>
             </a:pPr>
             <a:r>
-              <a:rPr sz="650" b="1" spc="200">
+              <a:rPr sz="650" b="1" spc="220">
                 <a:solidFill>
                   <a:srgbClr val="62154C"/>
                 </a:solidFill>
@@ -3254,13 +3254,13 @@
         </p:nvCxnSpPr>
         <p:spPr>
           <a:xfrm>
-            <a:off x="252000" y="1051200"/>
+            <a:off x="252000" y="907200"/>
             <a:ext cx="2736000" cy="0"/>
           </a:xfrm>
           <a:prstGeom prst="line">
             <a:avLst/>
           </a:prstGeom>
-          <a:ln w="5760">
+          <a:ln w="3600">
             <a:solidFill>
               <a:srgbClr val="F8BEE3"/>
             </a:solidFill>
@@ -3275,8 +3275,8 @@
         </p:nvSpPr>
         <p:spPr>
           <a:xfrm>
-            <a:off x="252000" y="1123200"/>
-            <a:ext cx="576000" cy="99061"/>
+            <a:off x="252000" y="986400"/>
+            <a:ext cx="576000" cy="91441"/>
           </a:xfrm>
           <a:prstGeom prst="rect">
             <a:avLst/>
@@ -3291,11 +3291,11 @@
           <a:p>
             <a:pPr algn="l">
               <a:lnSpc>
-                <a:spcPts val="754"/>
+                <a:spcPts val="696"/>
               </a:lnSpc>
             </a:pPr>
             <a:r>
-              <a:rPr sz="520" b="1" spc="150">
+              <a:rPr sz="480" b="1" spc="160">
                 <a:solidFill>
                   <a:srgbClr val="62154C"/>
                 </a:solidFill>
@@ -3315,8 +3315,8 @@
         </p:nvSpPr>
         <p:spPr>
           <a:xfrm>
-            <a:off x="900000" y="1101600"/>
-            <a:ext cx="2088000" cy="142876"/>
+            <a:off x="936000" y="968400"/>
+            <a:ext cx="2052000" cy="133351"/>
           </a:xfrm>
           <a:prstGeom prst="rect">
             <a:avLst/>
@@ -3331,11 +3331,11 @@
           <a:p>
             <a:pPr algn="l">
               <a:lnSpc>
-                <a:spcPts val="1087"/>
+                <a:spcPts val="1015"/>
               </a:lnSpc>
             </a:pPr>
             <a:r>
-              <a:rPr sz="750" b="0">
+              <a:rPr sz="700" b="0">
                 <a:solidFill>
                   <a:srgbClr val="12151C"/>
                 </a:solidFill>
@@ -3355,13 +3355,13 @@
         </p:nvCxnSpPr>
         <p:spPr>
           <a:xfrm>
-            <a:off x="252000" y="1274400"/>
+            <a:off x="252000" y="1137600"/>
             <a:ext cx="2736000" cy="0"/>
           </a:xfrm>
           <a:prstGeom prst="line">
             <a:avLst/>
           </a:prstGeom>
-          <a:ln w="5760">
+          <a:ln w="3600">
             <a:solidFill>
               <a:srgbClr val="F8BEE3"/>
             </a:solidFill>
@@ -3376,8 +3376,8 @@
         </p:nvSpPr>
         <p:spPr>
           <a:xfrm>
-            <a:off x="252000" y="1346400"/>
-            <a:ext cx="576000" cy="99061"/>
+            <a:off x="252000" y="1216800"/>
+            <a:ext cx="576000" cy="91441"/>
           </a:xfrm>
           <a:prstGeom prst="rect">
             <a:avLst/>
@@ -3392,11 +3392,11 @@
           <a:p>
             <a:pPr algn="l">
               <a:lnSpc>
-                <a:spcPts val="754"/>
+                <a:spcPts val="696"/>
               </a:lnSpc>
             </a:pPr>
             <a:r>
-              <a:rPr sz="520" b="1" spc="150">
+              <a:rPr sz="480" b="1" spc="160">
                 <a:solidFill>
                   <a:srgbClr val="62154C"/>
                 </a:solidFill>
@@ -3416,8 +3416,8 @@
         </p:nvSpPr>
         <p:spPr>
           <a:xfrm>
-            <a:off x="900000" y="1324800"/>
-            <a:ext cx="2088000" cy="142876"/>
+            <a:off x="936000" y="1198800"/>
+            <a:ext cx="2052000" cy="133351"/>
           </a:xfrm>
           <a:prstGeom prst="rect">
             <a:avLst/>
@@ -3432,11 +3432,11 @@
           <a:p>
             <a:pPr algn="l">
               <a:lnSpc>
-                <a:spcPts val="1087"/>
+                <a:spcPts val="1015"/>
               </a:lnSpc>
             </a:pPr>
             <a:r>
-              <a:rPr sz="750" b="0">
+              <a:rPr sz="700" b="0">
                 <a:solidFill>
                   <a:srgbClr val="12151C"/>
                 </a:solidFill>
@@ -3456,13 +3456,13 @@
         </p:nvCxnSpPr>
         <p:spPr>
           <a:xfrm>
-            <a:off x="252000" y="1497600"/>
+            <a:off x="252000" y="1368000"/>
             <a:ext cx="2736000" cy="0"/>
           </a:xfrm>
           <a:prstGeom prst="line">
             <a:avLst/>
           </a:prstGeom>
-          <a:ln w="5760">
+          <a:ln w="3600">
             <a:solidFill>
               <a:srgbClr val="F8BEE3"/>
             </a:solidFill>
@@ -3477,8 +3477,8 @@
         </p:nvSpPr>
         <p:spPr>
           <a:xfrm>
-            <a:off x="252000" y="1569600"/>
-            <a:ext cx="576000" cy="99061"/>
+            <a:off x="252000" y="1447200"/>
+            <a:ext cx="576000" cy="91441"/>
           </a:xfrm>
           <a:prstGeom prst="rect">
             <a:avLst/>
@@ -3493,11 +3493,11 @@
           <a:p>
             <a:pPr algn="l">
               <a:lnSpc>
-                <a:spcPts val="754"/>
+                <a:spcPts val="696"/>
               </a:lnSpc>
             </a:pPr>
             <a:r>
-              <a:rPr sz="520" b="1" spc="150">
+              <a:rPr sz="480" b="1" spc="160">
                 <a:solidFill>
                   <a:srgbClr val="62154C"/>
                 </a:solidFill>
@@ -3517,8 +3517,8 @@
         </p:nvSpPr>
         <p:spPr>
           <a:xfrm>
-            <a:off x="900000" y="1548000"/>
-            <a:ext cx="2088000" cy="142876"/>
+            <a:off x="936000" y="1429200"/>
+            <a:ext cx="2052000" cy="133351"/>
           </a:xfrm>
           <a:prstGeom prst="rect">
             <a:avLst/>
@@ -3533,11 +3533,11 @@
           <a:p>
             <a:pPr algn="l">
               <a:lnSpc>
-                <a:spcPts val="1087"/>
+                <a:spcPts val="1015"/>
               </a:lnSpc>
             </a:pPr>
             <a:r>
-              <a:rPr sz="750" b="0">
+              <a:rPr sz="700" b="0">
                 <a:solidFill>
                   <a:srgbClr val="12151C"/>
                 </a:solidFill>
@@ -3557,13 +3557,13 @@
         </p:nvCxnSpPr>
         <p:spPr>
           <a:xfrm>
-            <a:off x="252000" y="1720800"/>
+            <a:off x="252000" y="1598400"/>
             <a:ext cx="2736000" cy="0"/>
           </a:xfrm>
           <a:prstGeom prst="line">
             <a:avLst/>
           </a:prstGeom>
-          <a:ln w="5760">
+          <a:ln w="3600">
             <a:solidFill>
               <a:srgbClr val="F8BEE3"/>
             </a:solidFill>
@@ -3596,18 +3596,226 @@
         <p:nvPr/>
       </p:nvGrpSpPr>
       <p:grpSpPr/>
-      <p:sp>
-        <p:nvSpPr>
-          <p:cNvPr id="2" name="Oval 1"/>
+      <p:cxnSp>
+        <p:nvCxnSpPr>
+          <p:cNvPr id="2" name="Connector 1"/>
+          <p:cNvCxnSpPr/>
+          <p:nvPr/>
+        </p:nvCxnSpPr>
+        <p:spPr>
+          <a:xfrm>
+            <a:off x="93600" y="122400"/>
+            <a:ext cx="57600" cy="0"/>
+          </a:xfrm>
+          <a:prstGeom prst="line">
+            <a:avLst/>
+          </a:prstGeom>
+          <a:ln w="3600">
+            <a:solidFill>
+              <a:srgbClr val="2A2F38"/>
+            </a:solidFill>
+          </a:ln>
+        </p:spPr>
+      </p:cxnSp>
+      <p:cxnSp>
+        <p:nvCxnSpPr>
+          <p:cNvPr id="3" name="Connector 2"/>
+          <p:cNvCxnSpPr/>
+          <p:nvPr/>
+        </p:nvCxnSpPr>
+        <p:spPr>
+          <a:xfrm>
+            <a:off x="122400" y="93600"/>
+            <a:ext cx="0" cy="57600"/>
+          </a:xfrm>
+          <a:prstGeom prst="line">
+            <a:avLst/>
+          </a:prstGeom>
+          <a:ln w="3600">
+            <a:solidFill>
+              <a:srgbClr val="2A2F38"/>
+            </a:solidFill>
+          </a:ln>
+        </p:spPr>
+      </p:cxnSp>
+      <p:cxnSp>
+        <p:nvCxnSpPr>
+          <p:cNvPr id="4" name="Connector 3"/>
+          <p:cNvCxnSpPr/>
+          <p:nvPr/>
+        </p:nvCxnSpPr>
+        <p:spPr>
+          <a:xfrm>
+            <a:off x="3088800" y="122400"/>
+            <a:ext cx="57600" cy="0"/>
+          </a:xfrm>
+          <a:prstGeom prst="line">
+            <a:avLst/>
+          </a:prstGeom>
+          <a:ln w="3600">
+            <a:solidFill>
+              <a:srgbClr val="2A2F38"/>
+            </a:solidFill>
+          </a:ln>
+        </p:spPr>
+      </p:cxnSp>
+      <p:cxnSp>
+        <p:nvCxnSpPr>
+          <p:cNvPr id="5" name="Connector 4"/>
+          <p:cNvCxnSpPr/>
+          <p:nvPr/>
+        </p:nvCxnSpPr>
+        <p:spPr>
+          <a:xfrm>
+            <a:off x="3117600" y="93600"/>
+            <a:ext cx="0" cy="57600"/>
+          </a:xfrm>
+          <a:prstGeom prst="line">
+            <a:avLst/>
+          </a:prstGeom>
+          <a:ln w="3600">
+            <a:solidFill>
+              <a:srgbClr val="2A2F38"/>
+            </a:solidFill>
+          </a:ln>
+        </p:spPr>
+      </p:cxnSp>
+      <p:cxnSp>
+        <p:nvCxnSpPr>
+          <p:cNvPr id="6" name="Connector 5"/>
+          <p:cNvCxnSpPr/>
+          <p:nvPr/>
+        </p:nvCxnSpPr>
+        <p:spPr>
+          <a:xfrm>
+            <a:off x="93600" y="1677600"/>
+            <a:ext cx="57600" cy="0"/>
+          </a:xfrm>
+          <a:prstGeom prst="line">
+            <a:avLst/>
+          </a:prstGeom>
+          <a:ln w="3600">
+            <a:solidFill>
+              <a:srgbClr val="2A2F38"/>
+            </a:solidFill>
+          </a:ln>
+        </p:spPr>
+      </p:cxnSp>
+      <p:cxnSp>
+        <p:nvCxnSpPr>
+          <p:cNvPr id="7" name="Connector 6"/>
+          <p:cNvCxnSpPr/>
+          <p:nvPr/>
+        </p:nvCxnSpPr>
+        <p:spPr>
+          <a:xfrm>
+            <a:off x="122400" y="1648800"/>
+            <a:ext cx="0" cy="57600"/>
+          </a:xfrm>
+          <a:prstGeom prst="line">
+            <a:avLst/>
+          </a:prstGeom>
+          <a:ln w="3600">
+            <a:solidFill>
+              <a:srgbClr val="2A2F38"/>
+            </a:solidFill>
+          </a:ln>
+        </p:spPr>
+      </p:cxnSp>
+      <p:cxnSp>
+        <p:nvCxnSpPr>
+          <p:cNvPr id="8" name="Connector 7"/>
+          <p:cNvCxnSpPr/>
+          <p:nvPr/>
+        </p:nvCxnSpPr>
+        <p:spPr>
+          <a:xfrm>
+            <a:off x="3088800" y="1677600"/>
+            <a:ext cx="57600" cy="0"/>
+          </a:xfrm>
+          <a:prstGeom prst="line">
+            <a:avLst/>
+          </a:prstGeom>
+          <a:ln w="3600">
+            <a:solidFill>
+              <a:srgbClr val="2A2F38"/>
+            </a:solidFill>
+          </a:ln>
+        </p:spPr>
+      </p:cxnSp>
+      <p:cxnSp>
+        <p:nvCxnSpPr>
+          <p:cNvPr id="9" name="Connector 8"/>
+          <p:cNvCxnSpPr/>
+          <p:nvPr/>
+        </p:nvCxnSpPr>
+        <p:spPr>
+          <a:xfrm>
+            <a:off x="3117600" y="1648800"/>
+            <a:ext cx="0" cy="57600"/>
+          </a:xfrm>
+          <a:prstGeom prst="line">
+            <a:avLst/>
+          </a:prstGeom>
+          <a:ln w="3600">
+            <a:solidFill>
+              <a:srgbClr val="2A2F38"/>
+            </a:solidFill>
+          </a:ln>
+        </p:spPr>
+      </p:cxnSp>
+      <p:sp>
+        <p:nvSpPr>
+          <p:cNvPr id="10" name="텍스트"/>
+          <p:cNvSpPr txBox="1"/>
+          <p:nvPr/>
+        </p:nvSpPr>
+        <p:spPr>
+          <a:xfrm>
+            <a:off x="360000" y="331200"/>
+            <a:ext cx="2520000" cy="99061"/>
+          </a:xfrm>
+          <a:prstGeom prst="rect">
+            <a:avLst/>
+          </a:prstGeom>
+          <a:noFill/>
+        </p:spPr>
+        <p:txBody>
+          <a:bodyPr wrap="square" lIns="0" rIns="0" tIns="0" bIns="0" anchor="t">
+            <a:spAutoFit/>
+          </a:bodyPr>
+          <a:lstStyle/>
+          <a:p>
+            <a:pPr algn="ctr">
+              <a:lnSpc>
+                <a:spcPts val="754"/>
+              </a:lnSpc>
+            </a:pPr>
+            <a:r>
+              <a:rPr sz="520" b="1" spc="240">
+                <a:solidFill>
+                  <a:srgbClr val="A3A9B5"/>
+                </a:solidFill>
+                <a:latin typeface="맑은 고딕"/>
+                <a:ea typeface="맑은 고딕"/>
+              </a:rPr>
+              <a:t>수업 안내</a:t>
+            </a:r>
+          </a:p>
+        </p:txBody>
+      </p:sp>
+      <p:sp>
+        <p:nvSpPr>
+          <p:cNvPr id="11" name="Rectangle 10"/>
           <p:cNvSpPr/>
           <p:nvPr/>
         </p:nvSpPr>
         <p:spPr>
           <a:xfrm>
-            <a:off x="1591200" y="511200"/>
-            <a:ext cx="57600" cy="57600"/>
-          </a:xfrm>
-          <a:prstGeom prst="ellipse">
+            <a:off x="1530000" y="453600"/>
+            <a:ext cx="180000" cy="14400"/>
+          </a:xfrm>
+          <a:prstGeom prst="rect">
             <a:avLst/>
           </a:prstGeom>
           <a:solidFill>
@@ -3627,14 +3835,14 @@
       </p:sp>
       <p:sp>
         <p:nvSpPr>
-          <p:cNvPr id="3" name="텍스트"/>
+          <p:cNvPr id="12" name="텍스트"/>
           <p:cNvSpPr txBox="1"/>
           <p:nvPr/>
         </p:nvSpPr>
         <p:spPr>
           <a:xfrm>
-            <a:off x="396000" y="684000"/>
-            <a:ext cx="2448000" cy="504000"/>
+            <a:off x="360000" y="684000"/>
+            <a:ext cx="840000" cy="216000"/>
           </a:xfrm>
           <a:prstGeom prst="rect">
             <a:avLst/>
@@ -3642,38 +3850,261 @@
           <a:noFill/>
         </p:spPr>
         <p:txBody>
-          <a:bodyPr wrap="square" lIns="0" rIns="0" tIns="0" bIns="0" anchor="t">
+          <a:bodyPr wrap="square" lIns="0" rIns="0" tIns="0" bIns="0" anchor="ctr">
             <a:spAutoFit/>
           </a:bodyPr>
           <a:lstStyle/>
           <a:p>
             <a:pPr algn="ctr">
               <a:lnSpc>
-                <a:spcPts val="1739"/>
+                <a:spcPts val="1015"/>
               </a:lnSpc>
             </a:pPr>
             <a:r>
-              <a:rPr sz="1200" b="1">
+              <a:rPr sz="700" b="1">
                 <a:solidFill>
                   <a:srgbClr val="FFFFFF"/>
                 </a:solidFill>
                 <a:latin typeface="맑은 고딕"/>
                 <a:ea typeface="맑은 고딕"/>
               </a:rPr>
-              <a:t>오늘도 한 아이의 편이 되겠습니다</a:t>
-            </a:r>
-          </a:p>
-        </p:txBody>
-      </p:sp>
-      <p:sp>
-        <p:nvSpPr>
-          <p:cNvPr id="4" name="텍스트"/>
+              <a:t>음악</a:t>
+            </a:r>
+          </a:p>
+        </p:txBody>
+      </p:sp>
+      <p:sp>
+        <p:nvSpPr>
+          <p:cNvPr id="13" name="텍스트"/>
           <p:cNvSpPr txBox="1"/>
           <p:nvPr/>
         </p:nvSpPr>
         <p:spPr>
           <a:xfrm>
-            <a:off x="360000" y="1339200"/>
+            <a:off x="1200000" y="684000"/>
+            <a:ext cx="840000" cy="216000"/>
+          </a:xfrm>
+          <a:prstGeom prst="rect">
+            <a:avLst/>
+          </a:prstGeom>
+          <a:noFill/>
+        </p:spPr>
+        <p:txBody>
+          <a:bodyPr wrap="square" lIns="0" rIns="0" tIns="0" bIns="0" anchor="ctr">
+            <a:spAutoFit/>
+          </a:bodyPr>
+          <a:lstStyle/>
+          <a:p>
+            <a:pPr algn="ctr">
+              <a:lnSpc>
+                <a:spcPts val="1015"/>
+              </a:lnSpc>
+            </a:pPr>
+            <a:r>
+              <a:rPr sz="700" b="1">
+                <a:solidFill>
+                  <a:srgbClr val="FFFFFF"/>
+                </a:solidFill>
+                <a:latin typeface="맑은 고딕"/>
+                <a:ea typeface="맑은 고딕"/>
+              </a:rPr>
+              <a:t>피아노</a:t>
+            </a:r>
+          </a:p>
+        </p:txBody>
+      </p:sp>
+      <p:cxnSp>
+        <p:nvCxnSpPr>
+          <p:cNvPr id="14" name="Connector 13"/>
+          <p:cNvCxnSpPr/>
+          <p:nvPr/>
+        </p:nvCxnSpPr>
+        <p:spPr>
+          <a:xfrm>
+            <a:off x="1200000" y="676800"/>
+            <a:ext cx="0" cy="230400"/>
+          </a:xfrm>
+          <a:prstGeom prst="line">
+            <a:avLst/>
+          </a:prstGeom>
+          <a:ln w="3600">
+            <a:solidFill>
+              <a:srgbClr val="2A2F38"/>
+            </a:solidFill>
+          </a:ln>
+        </p:spPr>
+      </p:cxnSp>
+      <p:sp>
+        <p:nvSpPr>
+          <p:cNvPr id="15" name="텍스트"/>
+          <p:cNvSpPr txBox="1"/>
+          <p:nvPr/>
+        </p:nvSpPr>
+        <p:spPr>
+          <a:xfrm>
+            <a:off x="2040000" y="684000"/>
+            <a:ext cx="840000" cy="216000"/>
+          </a:xfrm>
+          <a:prstGeom prst="rect">
+            <a:avLst/>
+          </a:prstGeom>
+          <a:noFill/>
+        </p:spPr>
+        <p:txBody>
+          <a:bodyPr wrap="square" lIns="0" rIns="0" tIns="0" bIns="0" anchor="ctr">
+            <a:spAutoFit/>
+          </a:bodyPr>
+          <a:lstStyle/>
+          <a:p>
+            <a:pPr algn="ctr">
+              <a:lnSpc>
+                <a:spcPts val="1015"/>
+              </a:lnSpc>
+            </a:pPr>
+            <a:r>
+              <a:rPr sz="700" b="1">
+                <a:solidFill>
+                  <a:srgbClr val="FFFFFF"/>
+                </a:solidFill>
+                <a:latin typeface="맑은 고딕"/>
+                <a:ea typeface="맑은 고딕"/>
+              </a:rPr>
+              <a:t>논술</a:t>
+            </a:r>
+          </a:p>
+        </p:txBody>
+      </p:sp>
+      <p:cxnSp>
+        <p:nvCxnSpPr>
+          <p:cNvPr id="16" name="Connector 15"/>
+          <p:cNvCxnSpPr/>
+          <p:nvPr/>
+        </p:nvCxnSpPr>
+        <p:spPr>
+          <a:xfrm>
+            <a:off x="2040000" y="676800"/>
+            <a:ext cx="0" cy="230400"/>
+          </a:xfrm>
+          <a:prstGeom prst="line">
+            <a:avLst/>
+          </a:prstGeom>
+          <a:ln w="3600">
+            <a:solidFill>
+              <a:srgbClr val="2A2F38"/>
+            </a:solidFill>
+          </a:ln>
+        </p:spPr>
+      </p:cxnSp>
+      <p:cxnSp>
+        <p:nvCxnSpPr>
+          <p:cNvPr id="17" name="Connector 16"/>
+          <p:cNvCxnSpPr/>
+          <p:nvPr/>
+        </p:nvCxnSpPr>
+        <p:spPr>
+          <a:xfrm>
+            <a:off x="360000" y="1159200"/>
+            <a:ext cx="2520000" cy="0"/>
+          </a:xfrm>
+          <a:prstGeom prst="line">
+            <a:avLst/>
+          </a:prstGeom>
+          <a:ln w="3600">
+            <a:solidFill>
+              <a:srgbClr val="2A2F38"/>
+            </a:solidFill>
+          </a:ln>
+        </p:spPr>
+      </p:cxnSp>
+      <p:sp>
+        <p:nvSpPr>
+          <p:cNvPr id="18" name="텍스트"/>
+          <p:cNvSpPr txBox="1"/>
+          <p:nvPr/>
+        </p:nvSpPr>
+        <p:spPr>
+          <a:xfrm>
+            <a:off x="360000" y="1245600"/>
+            <a:ext cx="1224000" cy="118111"/>
+          </a:xfrm>
+          <a:prstGeom prst="rect">
+            <a:avLst/>
+          </a:prstGeom>
+          <a:noFill/>
+        </p:spPr>
+        <p:txBody>
+          <a:bodyPr wrap="square" lIns="0" rIns="0" tIns="0" bIns="0" anchor="t">
+            <a:spAutoFit/>
+          </a:bodyPr>
+          <a:lstStyle/>
+          <a:p>
+            <a:pPr algn="ctr">
+              <a:lnSpc>
+                <a:spcPts val="899"/>
+              </a:lnSpc>
+            </a:pPr>
+            <a:r>
+              <a:rPr sz="620" b="0">
+                <a:solidFill>
+                  <a:srgbClr val="FFFFFF"/>
+                </a:solidFill>
+                <a:latin typeface="맑은 고딕"/>
+                <a:ea typeface="맑은 고딕"/>
+              </a:rPr>
+              <a:t>평일 13:00 – 21:00</a:t>
+            </a:r>
+          </a:p>
+        </p:txBody>
+      </p:sp>
+      <p:sp>
+        <p:nvSpPr>
+          <p:cNvPr id="19" name="텍스트"/>
+          <p:cNvSpPr txBox="1"/>
+          <p:nvPr/>
+        </p:nvSpPr>
+        <p:spPr>
+          <a:xfrm>
+            <a:off x="1656000" y="1245600"/>
+            <a:ext cx="1224000" cy="118111"/>
+          </a:xfrm>
+          <a:prstGeom prst="rect">
+            <a:avLst/>
+          </a:prstGeom>
+          <a:noFill/>
+        </p:spPr>
+        <p:txBody>
+          <a:bodyPr wrap="square" lIns="0" rIns="0" tIns="0" bIns="0" anchor="t">
+            <a:spAutoFit/>
+          </a:bodyPr>
+          <a:lstStyle/>
+          <a:p>
+            <a:pPr algn="ctr">
+              <a:lnSpc>
+                <a:spcPts val="899"/>
+              </a:lnSpc>
+            </a:pPr>
+            <a:r>
+              <a:rPr sz="620" b="0">
+                <a:solidFill>
+                  <a:srgbClr val="FFFFFF"/>
+                </a:solidFill>
+                <a:latin typeface="맑은 고딕"/>
+                <a:ea typeface="맑은 고딕"/>
+              </a:rPr>
+              <a:t>INSTAGRAM  @아이디</a:t>
+            </a:r>
+          </a:p>
+        </p:txBody>
+      </p:sp>
+      <p:sp>
+        <p:nvSpPr>
+          <p:cNvPr id="20" name="텍스트"/>
+          <p:cNvSpPr txBox="1"/>
+          <p:nvPr/>
+        </p:nvSpPr>
+        <p:spPr>
+          <a:xfrm>
+            <a:off x="360000" y="1526400"/>
             <a:ext cx="2520000" cy="123826"/>
           </a:xfrm>
           <a:prstGeom prst="rect">
@@ -3693,7 +4124,7 @@
               </a:lnSpc>
             </a:pPr>
             <a:r>
-              <a:rPr sz="650" b="1" spc="300">
+              <a:rPr sz="650" b="1" spc="220">
                 <a:solidFill>
                   <a:srgbClr val="A3A9B5"/>
                 </a:solidFill>
